--- a/04.Langchain_Structured_output/LangChain_Structured_Output_Part3B.pptx
+++ b/04.Langchain_Structured_output/LangChain_Structured_Output_Part3B.pptx
@@ -77,16 +77,7 @@
                 </a:solidFill>
                 <a:latin typeface="Calibri"/>
               </a:rPr>
-              <a:t>Click to move the </a:t>
-            </a:r>
-            <a:r>
-              <a:rPr b="0" lang="en-IN" sz="1800" spc="-1" strike="noStrike">
-                <a:solidFill>
-                  <a:srgbClr val="000000"/>
-                </a:solidFill>
-                <a:latin typeface="Calibri"/>
-              </a:rPr>
-              <a:t>slide</a:t>
+              <a:t>Click to move the slide</a:t>
             </a:r>
             <a:endParaRPr b="0" lang="en-IN" sz="1800" spc="-1" strike="noStrike">
               <a:solidFill>
@@ -314,7 +305,7 @@
             <a:pPr algn="r">
               <a:buNone/>
             </a:pPr>
-            <a:fld id="{23FCDCEF-0D85-4A87-940B-52E934F21D9E}" type="slidenum">
+            <a:fld id="{58B08041-0CF1-4DD6-BC44-3CF2F597AA95}" type="slidenum">
               <a:rPr b="0" lang="en-IN" sz="1400" spc="-1" strike="noStrike">
                 <a:latin typeface="Times New Roman"/>
               </a:rPr>
@@ -455,7 +446,7 @@
               </a:lnSpc>
               <a:buNone/>
             </a:pPr>
-            <a:fld id="{9BF56183-AE77-4093-A713-ADC4CB35D61F}" type="slidenum">
+            <a:fld id="{44297E31-4D79-4746-A3E7-289E7C09C013}" type="slidenum">
               <a:rPr b="0" lang="en-US" sz="1200" spc="-1" strike="noStrike">
                 <a:solidFill>
                   <a:srgbClr val="000000"/>
@@ -599,7 +590,7 @@
               </a:lnSpc>
               <a:buNone/>
             </a:pPr>
-            <a:fld id="{A9DE5976-F4B8-445C-823A-6A34E8CD88E2}" type="slidenum">
+            <a:fld id="{C2EFD0D6-938C-407C-A1EA-5191EB03A3ED}" type="slidenum">
               <a:rPr b="0" lang="en-US" sz="1200" spc="-1" strike="noStrike">
                 <a:solidFill>
                   <a:srgbClr val="000000"/>
@@ -743,7 +734,7 @@
               </a:lnSpc>
               <a:buNone/>
             </a:pPr>
-            <a:fld id="{58496C79-BDEA-49D2-AF22-4066E5D789CC}" type="slidenum">
+            <a:fld id="{9BAD60CD-907E-4BFF-8EA0-BF34F741F68B}" type="slidenum">
               <a:rPr b="0" lang="en-US" sz="1200" spc="-1" strike="noStrike">
                 <a:solidFill>
                   <a:srgbClr val="000000"/>
@@ -887,7 +878,7 @@
               </a:lnSpc>
               <a:buNone/>
             </a:pPr>
-            <a:fld id="{1A386E67-8B76-4F41-AA81-BA227EAD08C0}" type="slidenum">
+            <a:fld id="{90725EC0-725B-4150-9BE6-71B685CED55C}" type="slidenum">
               <a:rPr b="0" lang="en-US" sz="1200" spc="-1" strike="noStrike">
                 <a:solidFill>
                   <a:srgbClr val="000000"/>
@@ -1031,7 +1022,7 @@
               </a:lnSpc>
               <a:buNone/>
             </a:pPr>
-            <a:fld id="{B6711F46-0A13-4579-8010-3B90BC30A580}" type="slidenum">
+            <a:fld id="{861B1720-712C-4E95-96ED-C2092B881DFB}" type="slidenum">
               <a:rPr b="0" lang="en-US" sz="1200" spc="-1" strike="noStrike">
                 <a:solidFill>
                   <a:srgbClr val="000000"/>
@@ -1175,7 +1166,7 @@
               </a:lnSpc>
               <a:buNone/>
             </a:pPr>
-            <a:fld id="{D729954F-C60E-4908-BECB-E266E4AEFC97}" type="slidenum">
+            <a:fld id="{CDD450E6-ED86-47B0-9906-03145DA963E2}" type="slidenum">
               <a:rPr b="0" lang="en-US" sz="1200" spc="-1" strike="noStrike">
                 <a:solidFill>
                   <a:srgbClr val="000000"/>
@@ -1319,7 +1310,7 @@
               </a:lnSpc>
               <a:buNone/>
             </a:pPr>
-            <a:fld id="{72BC20B0-A3F0-4DC3-9D0E-D55DFC03E8CE}" type="slidenum">
+            <a:fld id="{83170618-85CA-49BF-A889-C8564FF77802}" type="slidenum">
               <a:rPr b="0" lang="en-US" sz="1200" spc="-1" strike="noStrike">
                 <a:solidFill>
                   <a:srgbClr val="000000"/>
@@ -1463,7 +1454,7 @@
               </a:lnSpc>
               <a:buNone/>
             </a:pPr>
-            <a:fld id="{1FD12B7D-BBAF-426C-B32E-548B8A52B278}" type="slidenum">
+            <a:fld id="{5F19D169-0208-4A19-A8BC-2619FF5B780A}" type="slidenum">
               <a:rPr b="0" lang="en-US" sz="1200" spc="-1" strike="noStrike">
                 <a:solidFill>
                   <a:srgbClr val="000000"/>
@@ -1607,7 +1598,7 @@
               </a:lnSpc>
               <a:buNone/>
             </a:pPr>
-            <a:fld id="{4456DE9F-723D-46BC-8CB9-4008BBDC02DD}" type="slidenum">
+            <a:fld id="{91C6C86F-2183-4B23-B5CA-2E9AF370E1BD}" type="slidenum">
               <a:rPr b="0" lang="en-US" sz="1200" spc="-1" strike="noStrike">
                 <a:solidFill>
                   <a:srgbClr val="000000"/>
@@ -1751,7 +1742,7 @@
               </a:lnSpc>
               <a:buNone/>
             </a:pPr>
-            <a:fld id="{5FC6EA76-D2E1-4B7E-A843-320136BE15F6}" type="slidenum">
+            <a:fld id="{E840FF96-E2FB-4C0D-87E8-8AB8E74EABFF}" type="slidenum">
               <a:rPr b="0" lang="en-US" sz="1200" spc="-1" strike="noStrike">
                 <a:solidFill>
                   <a:srgbClr val="000000"/>
@@ -1895,7 +1886,7 @@
               </a:lnSpc>
               <a:buNone/>
             </a:pPr>
-            <a:fld id="{0F25E267-1ED1-4B60-905F-A4569587F46C}" type="slidenum">
+            <a:fld id="{6F522787-B3CA-4502-A902-0F504A1FBE0E}" type="slidenum">
               <a:rPr b="0" lang="en-US" sz="1200" spc="-1" strike="noStrike">
                 <a:solidFill>
                   <a:srgbClr val="000000"/>
@@ -3571,7 +3562,151 @@
                 </a:solidFill>
                 <a:latin typeface="Calibri"/>
               </a:rPr>
-              <a:t>Click to edit the title text format</a:t>
+              <a:t>Cl</a:t>
+            </a:r>
+            <a:r>
+              <a:rPr b="0" lang="en-IN" sz="1800" spc="-1" strike="noStrike">
+                <a:solidFill>
+                  <a:srgbClr val="000000"/>
+                </a:solidFill>
+                <a:latin typeface="Calibri"/>
+              </a:rPr>
+              <a:t>ic</a:t>
+            </a:r>
+            <a:r>
+              <a:rPr b="0" lang="en-IN" sz="1800" spc="-1" strike="noStrike">
+                <a:solidFill>
+                  <a:srgbClr val="000000"/>
+                </a:solidFill>
+                <a:latin typeface="Calibri"/>
+              </a:rPr>
+              <a:t>k </a:t>
+            </a:r>
+            <a:r>
+              <a:rPr b="0" lang="en-IN" sz="1800" spc="-1" strike="noStrike">
+                <a:solidFill>
+                  <a:srgbClr val="000000"/>
+                </a:solidFill>
+                <a:latin typeface="Calibri"/>
+              </a:rPr>
+              <a:t>to </a:t>
+            </a:r>
+            <a:r>
+              <a:rPr b="0" lang="en-IN" sz="1800" spc="-1" strike="noStrike">
+                <a:solidFill>
+                  <a:srgbClr val="000000"/>
+                </a:solidFill>
+                <a:latin typeface="Calibri"/>
+              </a:rPr>
+              <a:t>e</a:t>
+            </a:r>
+            <a:r>
+              <a:rPr b="0" lang="en-IN" sz="1800" spc="-1" strike="noStrike">
+                <a:solidFill>
+                  <a:srgbClr val="000000"/>
+                </a:solidFill>
+                <a:latin typeface="Calibri"/>
+              </a:rPr>
+              <a:t>di</a:t>
+            </a:r>
+            <a:r>
+              <a:rPr b="0" lang="en-IN" sz="1800" spc="-1" strike="noStrike">
+                <a:solidFill>
+                  <a:srgbClr val="000000"/>
+                </a:solidFill>
+                <a:latin typeface="Calibri"/>
+              </a:rPr>
+              <a:t>t </a:t>
+            </a:r>
+            <a:r>
+              <a:rPr b="0" lang="en-IN" sz="1800" spc="-1" strike="noStrike">
+                <a:solidFill>
+                  <a:srgbClr val="000000"/>
+                </a:solidFill>
+                <a:latin typeface="Calibri"/>
+              </a:rPr>
+              <a:t>th</a:t>
+            </a:r>
+            <a:r>
+              <a:rPr b="0" lang="en-IN" sz="1800" spc="-1" strike="noStrike">
+                <a:solidFill>
+                  <a:srgbClr val="000000"/>
+                </a:solidFill>
+                <a:latin typeface="Calibri"/>
+              </a:rPr>
+              <a:t>e </a:t>
+            </a:r>
+            <a:r>
+              <a:rPr b="0" lang="en-IN" sz="1800" spc="-1" strike="noStrike">
+                <a:solidFill>
+                  <a:srgbClr val="000000"/>
+                </a:solidFill>
+                <a:latin typeface="Calibri"/>
+              </a:rPr>
+              <a:t>tit</a:t>
+            </a:r>
+            <a:r>
+              <a:rPr b="0" lang="en-IN" sz="1800" spc="-1" strike="noStrike">
+                <a:solidFill>
+                  <a:srgbClr val="000000"/>
+                </a:solidFill>
+                <a:latin typeface="Calibri"/>
+              </a:rPr>
+              <a:t>le </a:t>
+            </a:r>
+            <a:r>
+              <a:rPr b="0" lang="en-IN" sz="1800" spc="-1" strike="noStrike">
+                <a:solidFill>
+                  <a:srgbClr val="000000"/>
+                </a:solidFill>
+                <a:latin typeface="Calibri"/>
+              </a:rPr>
+              <a:t>te</a:t>
+            </a:r>
+            <a:r>
+              <a:rPr b="0" lang="en-IN" sz="1800" spc="-1" strike="noStrike">
+                <a:solidFill>
+                  <a:srgbClr val="000000"/>
+                </a:solidFill>
+                <a:latin typeface="Calibri"/>
+              </a:rPr>
+              <a:t>xt </a:t>
+            </a:r>
+            <a:r>
+              <a:rPr b="0" lang="en-IN" sz="1800" spc="-1" strike="noStrike">
+                <a:solidFill>
+                  <a:srgbClr val="000000"/>
+                </a:solidFill>
+                <a:latin typeface="Calibri"/>
+              </a:rPr>
+              <a:t>fo</a:t>
+            </a:r>
+            <a:r>
+              <a:rPr b="0" lang="en-IN" sz="1800" spc="-1" strike="noStrike">
+                <a:solidFill>
+                  <a:srgbClr val="000000"/>
+                </a:solidFill>
+                <a:latin typeface="Calibri"/>
+              </a:rPr>
+              <a:t>r</a:t>
+            </a:r>
+            <a:r>
+              <a:rPr b="0" lang="en-IN" sz="1800" spc="-1" strike="noStrike">
+                <a:solidFill>
+                  <a:srgbClr val="000000"/>
+                </a:solidFill>
+                <a:latin typeface="Calibri"/>
+              </a:rPr>
+              <a:t>m</a:t>
+            </a:r>
+            <a:r>
+              <a:rPr b="0" lang="en-IN" sz="1800" spc="-1" strike="noStrike">
+                <a:solidFill>
+                  <a:srgbClr val="000000"/>
+                </a:solidFill>
+                <a:latin typeface="Calibri"/>
+              </a:rPr>
+              <a:t>at</a:t>
             </a:r>
             <a:endParaRPr b="0" lang="en-IN" sz="1800" spc="-1" strike="noStrike">
               <a:solidFill>
@@ -7762,6 +7897,34 @@
                 <a:tab algn="l" pos="0"/>
               </a:tabLst>
             </a:pPr>
+            <a:endParaRPr b="0" lang="en-IN" sz="1100" spc="-1" strike="noStrike">
+              <a:latin typeface="Arial"/>
+            </a:endParaRPr>
+          </a:p>
+          <a:p>
+            <a:pPr>
+              <a:lnSpc>
+                <a:spcPct val="100000"/>
+              </a:lnSpc>
+              <a:buNone/>
+              <a:tabLst>
+                <a:tab algn="l" pos="0"/>
+              </a:tabLst>
+            </a:pPr>
+            <a:endParaRPr b="0" lang="en-IN" sz="1100" spc="-1" strike="noStrike">
+              <a:latin typeface="Arial"/>
+            </a:endParaRPr>
+          </a:p>
+          <a:p>
+            <a:pPr>
+              <a:lnSpc>
+                <a:spcPct val="100000"/>
+              </a:lnSpc>
+              <a:buNone/>
+              <a:tabLst>
+                <a:tab algn="l" pos="0"/>
+              </a:tabLst>
+            </a:pPr>
             <a:r>
               <a:rPr b="0" lang="en-US" sz="1100" spc="-1" strike="noStrike">
                 <a:solidFill>
@@ -12309,7 +12472,7 @@
         </p:nvSpPr>
         <p:spPr>
           <a:xfrm>
-            <a:off x="457200" y="1993320"/>
+            <a:off x="540000" y="1620000"/>
             <a:ext cx="4754520" cy="237240"/>
           </a:xfrm>
           <a:prstGeom prst="rect">
